--- a/templates/posts/october/2026-10-05-mon-ig-story-habitat-day.pptx
+++ b/templates/posts/october/2026-10-05-mon-ig-story-habitat-day.pptx
@@ -3518,7 +3518,7 @@
       <p:grpSpPr/>
       <p:pic>
         <p:nvPicPr>
-          <p:cNvPr id="2" name="Picture 1" descr="4217080708126727292.jpg"/>
+          <p:cNvPr id="2" name="Picture 1" descr="3576053940473857243.jpg"/>
           <p:cNvPicPr>
             <a:picLocks noChangeAspect="1"/>
           </p:cNvPicPr>

--- a/templates/posts/october/2026-10-05-mon-ig-story-habitat-day.pptx
+++ b/templates/posts/october/2026-10-05-mon-ig-story-habitat-day.pptx
@@ -3518,7 +3518,7 @@
       <p:grpSpPr/>
       <p:pic>
         <p:nvPicPr>
-          <p:cNvPr id="2" name="Picture 1" descr="3576053940473857243.jpg"/>
+          <p:cNvPr id="2" name="Picture 1" descr="5479554543388544896.jpg"/>
           <p:cNvPicPr>
             <a:picLocks noChangeAspect="1"/>
           </p:cNvPicPr>

--- a/templates/posts/october/2026-10-05-mon-ig-story-habitat-day.pptx
+++ b/templates/posts/october/2026-10-05-mon-ig-story-habitat-day.pptx
@@ -3518,7 +3518,7 @@
       <p:grpSpPr/>
       <p:pic>
         <p:nvPicPr>
-          <p:cNvPr id="2" name="Picture 1" descr="5479554543388544896.jpg"/>
+          <p:cNvPr id="2" name="Picture 1" descr="4314903783059501173.jpg"/>
           <p:cNvPicPr>
             <a:picLocks noChangeAspect="1"/>
           </p:cNvPicPr>

--- a/templates/posts/october/2026-10-05-mon-ig-story-habitat-day.pptx
+++ b/templates/posts/october/2026-10-05-mon-ig-story-habitat-day.pptx
@@ -3518,7 +3518,7 @@
       <p:grpSpPr/>
       <p:pic>
         <p:nvPicPr>
-          <p:cNvPr id="2" name="Picture 1" descr="4314903783059501173.jpg"/>
+          <p:cNvPr id="2" name="Picture 1" descr="5144575736136661276.jpg"/>
           <p:cNvPicPr>
             <a:picLocks noChangeAspect="1"/>
           </p:cNvPicPr>

--- a/templates/posts/october/2026-10-05-mon-ig-story-habitat-day.pptx
+++ b/templates/posts/october/2026-10-05-mon-ig-story-habitat-day.pptx
@@ -3518,7 +3518,7 @@
       <p:grpSpPr/>
       <p:pic>
         <p:nvPicPr>
-          <p:cNvPr id="2" name="Picture 1" descr="5144575736136661276.jpg"/>
+          <p:cNvPr id="2" name="Picture 1" descr="3570748462560601.jpg"/>
           <p:cNvPicPr>
             <a:picLocks noChangeAspect="1"/>
           </p:cNvPicPr>
@@ -3633,7 +3633,7 @@
         </p:nvSpPr>
         <p:spPr>
           <a:xfrm>
-            <a:off x="952500" y="8404759"/>
+            <a:off x="952500" y="8881009"/>
             <a:ext cx="8382000" cy="1428750"/>
           </a:xfrm>
           <a:prstGeom prst="rect">
@@ -3664,89 +3664,30 @@
           </a:p>
         </p:txBody>
       </p:sp>
-      <p:sp>
-        <p:nvSpPr>
-          <p:cNvPr id="6" name="Oval 5"/>
-          <p:cNvSpPr/>
+      <p:pic>
+        <p:nvPicPr>
+          <p:cNvPr id="6" name="Picture 5" descr="foundation-logo-white.png"/>
+          <p:cNvPicPr>
+            <a:picLocks noChangeAspect="1"/>
+          </p:cNvPicPr>
           <p:nvPr/>
-        </p:nvSpPr>
+        </p:nvPicPr>
+        <p:blipFill>
+          <a:blip r:embed="rId4"/>
+          <a:stretch>
+            <a:fillRect/>
+          </a:stretch>
+        </p:blipFill>
         <p:spPr>
           <a:xfrm>
-            <a:off x="4714875" y="14287500"/>
-            <a:ext cx="857250" cy="857250"/>
-          </a:xfrm>
-          <a:prstGeom prst="ellipse">
-            <a:avLst/>
-          </a:prstGeom>
-          <a:noFill/>
-          <a:ln w="19050">
-            <a:solidFill>
-              <a:srgbClr val="F4F1EA"/>
-            </a:solidFill>
-          </a:ln>
-          <a:effectLst/>
-        </p:spPr>
-        <p:style>
-          <a:lnRef idx="1">
-            <a:schemeClr val="accent1"/>
-          </a:lnRef>
-          <a:fillRef idx="3">
-            <a:schemeClr val="accent1"/>
-          </a:fillRef>
-          <a:effectRef idx="2">
-            <a:schemeClr val="accent1"/>
-          </a:effectRef>
-          <a:fontRef idx="minor">
-            <a:schemeClr val="lt1"/>
-          </a:fontRef>
-        </p:style>
-        <p:txBody>
-          <a:bodyPr rtlCol="0" anchor="ctr"/>
-          <a:lstStyle/>
-          <a:p>
-            <a:pPr algn="ctr"/>
-          </a:p>
-        </p:txBody>
-      </p:sp>
-      <p:sp>
-        <p:nvSpPr>
-          <p:cNvPr id="7" name="TextBox 6"/>
-          <p:cNvSpPr txBox="1"/>
-          <p:nvPr/>
-        </p:nvSpPr>
-        <p:spPr>
-          <a:xfrm>
-            <a:off x="4714875" y="14287500"/>
-            <a:ext cx="857250" cy="857250"/>
+            <a:off x="4666750" y="14287500"/>
+            <a:ext cx="953498" cy="857250"/>
           </a:xfrm>
           <a:prstGeom prst="rect">
             <a:avLst/>
           </a:prstGeom>
-          <a:noFill/>
         </p:spPr>
-        <p:txBody>
-          <a:bodyPr wrap="square" lIns="0" rIns="0" tIns="0" bIns="0" anchor="ctr">
-            <a:spAutoFit/>
-          </a:bodyPr>
-          <a:lstStyle/>
-          <a:p>
-            <a:pPr algn="ctr">
-              <a:lnSpc>
-                <a:spcPct val="120000"/>
-              </a:lnSpc>
-            </a:pPr>
-            <a:r>
-              <a:rPr sz="1800" b="1" i="0">
-                <a:solidFill>
-                  <a:srgbClr val="F4F1EA"/>
-                </a:solidFill>
-                <a:latin typeface="Montserrat"/>
-              </a:rPr>
-              <a:t>LOGO</a:t>
-            </a:r>
-          </a:p>
-        </p:txBody>
-      </p:sp>
+      </p:pic>
     </p:spTree>
   </p:cSld>
   <p:clrMapOvr>

--- a/templates/posts/october/2026-10-05-mon-ig-story-habitat-day.pptx
+++ b/templates/posts/october/2026-10-05-mon-ig-story-habitat-day.pptx
@@ -3504,7 +3504,7 @@
     <p:bg>
       <p:bgPr>
         <a:solidFill>
-          <a:srgbClr val="22371F"/>
+          <a:srgbClr val="1E3F1D"/>
         </a:solidFill>
         <a:effectLst/>
       </p:bgPr>
@@ -3518,7 +3518,7 @@
       <p:grpSpPr/>
       <p:pic>
         <p:nvPicPr>
-          <p:cNvPr id="2" name="Picture 1" descr="3570748462560601.jpg"/>
+          <p:cNvPr id="2" name="Picture 1" descr="5457729228435315559.jpg"/>
           <p:cNvPicPr>
             <a:picLocks noChangeAspect="1"/>
           </p:cNvPicPr>
@@ -3555,7 +3555,7 @@
             <a:avLst/>
           </a:prstGeom>
           <a:solidFill>
-            <a:srgbClr val="22371F">
+            <a:srgbClr val="1E3F1D">
               <a:alpha val="50000"/>
             </a:srgbClr>
           </a:solidFill>
@@ -3616,7 +3616,7 @@
             <a:r>
               <a:rPr sz="7200" b="1" i="0">
                 <a:solidFill>
-                  <a:srgbClr val="F4F1EA"/>
+                  <a:srgbClr val="F3F1EA"/>
                 </a:solidFill>
                 <a:latin typeface="Montserrat"/>
               </a:rPr>
@@ -3655,7 +3655,7 @@
             <a:r>
               <a:rPr sz="4400" b="0" i="0">
                 <a:solidFill>
-                  <a:srgbClr val="DBE6A7"/>
+                  <a:srgbClr val="B1BCB1"/>
                 </a:solidFill>
                 <a:latin typeface="Source Sans 3"/>
               </a:rPr>

--- a/templates/posts/october/2026-10-05-mon-ig-story-habitat-day.pptx
+++ b/templates/posts/october/2026-10-05-mon-ig-story-habitat-day.pptx
@@ -3518,7 +3518,7 @@
       <p:grpSpPr/>
       <p:pic>
         <p:nvPicPr>
-          <p:cNvPr id="2" name="Picture 1" descr="5457729228435315559.jpg"/>
+          <p:cNvPr id="2" name="Picture 1" descr="1113565466416617577.jpg"/>
           <p:cNvPicPr>
             <a:picLocks noChangeAspect="1"/>
           </p:cNvPicPr>
